--- a/slides/Turkey_Biomarkers_EN.pptx
+++ b/slides/Turkey_Biomarkers_EN.pptx
@@ -2285,7 +2285,7 @@
                           <a:ea typeface="Calibri" pitchFamily="34" charset="-122"/>
                           <a:cs typeface="Calibri" pitchFamily="34" charset="-120"/>
                         </a:rPr>
-                        <a:t>7 candidates (§2.3)</a:t>
+                        <a:t>7 candidates (§2.3 — a different gate ③)</a:t>
                       </a:r>
                       <a:endParaRPr lang="en-US" sz="1150" dirty="0">
                         <a:latin typeface="Calibri" charset="0"/>
@@ -7819,7 +7819,7 @@
               <a:buNone/>
             </a:pPr>
             <a:r>
-              <a:rPr lang="en-US" sz="1400" b="1" dirty="0">
+              <a:rPr lang="en-US" sz="1350" b="1" dirty="0">
                 <a:solidFill>
                   <a:srgbClr val="16252C"/>
                 </a:solidFill>
@@ -7827,9 +7827,9 @@
                 <a:ea typeface="Georgia" pitchFamily="34" charset="-122"/>
                 <a:cs typeface="Georgia" pitchFamily="34" charset="-120"/>
               </a:rPr>
-              <a:t>How these relate to the seven in §2.3</a:t>
+              <a:t>Neither set contains the other</a:t>
             </a:r>
-            <a:endParaRPr lang="en-US" sz="1400" dirty="0"/>
+            <a:endParaRPr lang="en-US" sz="1350" dirty="0"/>
           </a:p>
         </p:txBody>
       </p:sp>
@@ -7861,7 +7861,7 @@
               <a:buNone/>
             </a:pPr>
             <a:r>
-              <a:rPr lang="en-US" sz="1100" dirty="0">
+              <a:rPr lang="en-US" sz="1050" dirty="0">
                 <a:solidFill>
                   <a:srgbClr val="5F7580"/>
                 </a:solidFill>
@@ -7869,9 +7869,69 @@
                 <a:ea typeface="Calibri" pitchFamily="34" charset="-122"/>
                 <a:cs typeface="Calibri" pitchFamily="34" charset="-120"/>
               </a:rPr>
-              <a:t>These four are the stricter subset. Once L1 is added, Pediococcus, the unnamed Lactobacillaceae genus, Incertae_Sedis and Weissella fail to be selected consistently across all three C values.</a:t>
+              <a:t>Both start from the 11 of §2.2; only the third gate differs:</a:t>
             </a:r>
-            <a:endParaRPr lang="en-US" sz="1100" dirty="0"/>
+            <a:endParaRPr lang="en-US" sz="1050" dirty="0"/>
+          </a:p>
+          <a:p>
+            <a:pPr indent="0" marL="0">
+              <a:lnSpc>
+                <a:spcPct val="112000"/>
+              </a:lnSpc>
+              <a:buNone/>
+            </a:pPr>
+            <a:r>
+              <a:rPr lang="en-US" sz="1050" dirty="0">
+                <a:solidFill>
+                  <a:srgbClr val="5F7580"/>
+                </a:solidFill>
+                <a:latin typeface="Calibri" pitchFamily="34" charset="0"/>
+                <a:ea typeface="Calibri" pitchFamily="34" charset="-122"/>
+                <a:cs typeface="Calibri" pitchFamily="34" charset="-120"/>
+              </a:rPr>
+              <a:t>    11 ─┬─ plus cage screen → 7 (§2.3)</a:t>
+            </a:r>
+            <a:endParaRPr lang="en-US" sz="1050" dirty="0"/>
+          </a:p>
+          <a:p>
+            <a:pPr indent="0" marL="0">
+              <a:lnSpc>
+                <a:spcPct val="112000"/>
+              </a:lnSpc>
+              <a:buNone/>
+            </a:pPr>
+            <a:r>
+              <a:rPr lang="en-US" sz="1050" dirty="0">
+                <a:solidFill>
+                  <a:srgbClr val="5F7580"/>
+                </a:solidFill>
+                <a:latin typeface="Calibri" pitchFamily="34" charset="0"/>
+                <a:ea typeface="Calibri" pitchFamily="34" charset="-122"/>
+                <a:cs typeface="Calibri" pitchFamily="34" charset="-120"/>
+              </a:rPr>
+              <a:t>         └─ plus L1          → 4 (this slide)</a:t>
+            </a:r>
+            <a:endParaRPr lang="en-US" sz="1050" dirty="0"/>
+          </a:p>
+          <a:p>
+            <a:pPr indent="0" marL="0">
+              <a:lnSpc>
+                <a:spcPct val="112000"/>
+              </a:lnSpc>
+              <a:buNone/>
+            </a:pPr>
+            <a:r>
+              <a:rPr lang="en-US" sz="1050" dirty="0">
+                <a:solidFill>
+                  <a:srgbClr val="5F7580"/>
+                </a:solidFill>
+                <a:latin typeface="Calibri" pitchFamily="34" charset="0"/>
+                <a:ea typeface="Calibri" pitchFamily="34" charset="-122"/>
+                <a:cs typeface="Calibri" pitchFamily="34" charset="-120"/>
+              </a:rPr>
+              <a:t>            intersection → 2</a:t>
+            </a:r>
+            <a:endParaRPr lang="en-US" sz="1050" dirty="0"/>
           </a:p>
         </p:txBody>
       </p:sp>
@@ -7908,7 +7968,7 @@
                 <a:ea typeface="Georgia" pitchFamily="34" charset="-122"/>
                 <a:cs typeface="Georgia" pitchFamily="34" charset="-120"/>
               </a:rPr>
-              <a:t>Use these four when comparing against the duck cohort; use the seven in §2.3 when listing every candidate this cohort offers — both are correct at their own strictness.</a:t>
+              <a:t>Only 2 clear both gates — HT002 and Escherichia-Shigella — and those are this cohort's most defensible candidates. Use these four for the methodological comparison with the duck cohort, where the protocol has to match.</a:t>
             </a:r>
             <a:endParaRPr lang="en-US" sz="1250" dirty="0"/>
           </a:p>

--- a/slides/Turkey_Biomarkers_EN.pptx
+++ b/slides/Turkey_Biomarkers_EN.pptx
@@ -2285,7 +2285,7 @@
                           <a:ea typeface="Calibri" pitchFamily="34" charset="-122"/>
                           <a:cs typeface="Calibri" pitchFamily="34" charset="-120"/>
                         </a:rPr>
-                        <a:t>7 candidates (§2.3 — a different gate ③)</a:t>
+                        <a:t>7 candidates (incomplete protocol, retired)</a:t>
                       </a:r>
                       <a:endParaRPr lang="en-US" sz="1150" dirty="0">
                         <a:latin typeface="Calibri" charset="0"/>
@@ -7819,7 +7819,7 @@
               <a:buNone/>
             </a:pPr>
             <a:r>
-              <a:rPr lang="en-US" sz="1350" b="1" dirty="0">
+              <a:rPr lang="en-US" sz="1400" b="1" dirty="0">
                 <a:solidFill>
                   <a:srgbClr val="16252C"/>
                 </a:solidFill>
@@ -7827,9 +7827,9 @@
                 <a:ea typeface="Georgia" pitchFamily="34" charset="-122"/>
                 <a:cs typeface="Georgia" pitchFamily="34" charset="-120"/>
               </a:rPr>
-              <a:t>Neither set contains the other</a:t>
+              <a:t>Why layer ④ cannot be dropped</a:t>
             </a:r>
-            <a:endParaRPr lang="en-US" sz="1350" dirty="0"/>
+            <a:endParaRPr lang="en-US" sz="1400" dirty="0"/>
           </a:p>
         </p:txBody>
       </p:sp>
@@ -7861,7 +7861,7 @@
               <a:buNone/>
             </a:pPr>
             <a:r>
-              <a:rPr lang="en-US" sz="1050" dirty="0">
+              <a:rPr lang="en-US" sz="1100" dirty="0">
                 <a:solidFill>
                   <a:srgbClr val="5F7580"/>
                 </a:solidFill>
@@ -7869,69 +7869,9 @@
                 <a:ea typeface="Calibri" pitchFamily="34" charset="-122"/>
                 <a:cs typeface="Calibri" pitchFamily="34" charset="-120"/>
               </a:rPr>
-              <a:t>Both start from the 11 of §2.2; only the third gate differs:</a:t>
+              <a:t>Negativibacillus is the strongest feature under all three methods, yet it also differs across four isolators that are all positive. Drop the cage screen and the reported set is these four, half of them unattributable to infection.</a:t>
             </a:r>
-            <a:endParaRPr lang="en-US" sz="1050" dirty="0"/>
-          </a:p>
-          <a:p>
-            <a:pPr indent="0" marL="0">
-              <a:lnSpc>
-                <a:spcPct val="112000"/>
-              </a:lnSpc>
-              <a:buNone/>
-            </a:pPr>
-            <a:r>
-              <a:rPr lang="en-US" sz="1050" dirty="0">
-                <a:solidFill>
-                  <a:srgbClr val="5F7580"/>
-                </a:solidFill>
-                <a:latin typeface="Calibri" pitchFamily="34" charset="0"/>
-                <a:ea typeface="Calibri" pitchFamily="34" charset="-122"/>
-                <a:cs typeface="Calibri" pitchFamily="34" charset="-120"/>
-              </a:rPr>
-              <a:t>    11 ─┬─ plus cage screen → 7 (§2.3)</a:t>
-            </a:r>
-            <a:endParaRPr lang="en-US" sz="1050" dirty="0"/>
-          </a:p>
-          <a:p>
-            <a:pPr indent="0" marL="0">
-              <a:lnSpc>
-                <a:spcPct val="112000"/>
-              </a:lnSpc>
-              <a:buNone/>
-            </a:pPr>
-            <a:r>
-              <a:rPr lang="en-US" sz="1050" dirty="0">
-                <a:solidFill>
-                  <a:srgbClr val="5F7580"/>
-                </a:solidFill>
-                <a:latin typeface="Calibri" pitchFamily="34" charset="0"/>
-                <a:ea typeface="Calibri" pitchFamily="34" charset="-122"/>
-                <a:cs typeface="Calibri" pitchFamily="34" charset="-120"/>
-              </a:rPr>
-              <a:t>         └─ plus L1          → 4 (this slide)</a:t>
-            </a:r>
-            <a:endParaRPr lang="en-US" sz="1050" dirty="0"/>
-          </a:p>
-          <a:p>
-            <a:pPr indent="0" marL="0">
-              <a:lnSpc>
-                <a:spcPct val="112000"/>
-              </a:lnSpc>
-              <a:buNone/>
-            </a:pPr>
-            <a:r>
-              <a:rPr lang="en-US" sz="1050" dirty="0">
-                <a:solidFill>
-                  <a:srgbClr val="5F7580"/>
-                </a:solidFill>
-                <a:latin typeface="Calibri" pitchFamily="34" charset="0"/>
-                <a:ea typeface="Calibri" pitchFamily="34" charset="-122"/>
-                <a:cs typeface="Calibri" pitchFamily="34" charset="-120"/>
-              </a:rPr>
-              <a:t>            intersection → 2</a:t>
-            </a:r>
-            <a:endParaRPr lang="en-US" sz="1050" dirty="0"/>
+            <a:endParaRPr lang="en-US" sz="1100" dirty="0"/>
           </a:p>
         </p:txBody>
       </p:sp>
@@ -7968,7 +7908,7 @@
                 <a:ea typeface="Georgia" pitchFamily="34" charset="-122"/>
                 <a:cs typeface="Georgia" pitchFamily="34" charset="-120"/>
               </a:rPr>
-              <a:t>Only 2 clear both gates — HT002 and Escherichia-Shigella — and those are this cohort's most defensible candidates. Use these four for the methodological comparison with the duck cohort, where the protocol has to match.</a:t>
+              <a:t>Only 2 clear all four layers — HT002 (Pos down) and Escherichia-Shigella (Pos up) — and those are what this cohort can report. Layers ①–③ match the duck cohort, which is what makes the two comparable.</a:t>
             </a:r>
             <a:endParaRPr lang="en-US" sz="1250" dirty="0"/>
           </a:p>
